--- a/ゲーム科2年/00_前期/ゲーム開発Ⅱ/01_就職作品.pptx
+++ b/ゲーム科2年/00_前期/ゲーム開発Ⅱ/01_就職作品.pptx
@@ -13,6 +13,7 @@
     <p:sldId id="262" r:id="rId7"/>
     <p:sldId id="263" r:id="rId8"/>
     <p:sldId id="264" r:id="rId9"/>
+    <p:sldId id="265" r:id="rId10"/>
   </p:sldIdLst>
   <p:sldSz cx="12192000" cy="6858000"/>
   <p:notesSz cx="6858000" cy="9144000"/>
@@ -266,7 +267,7 @@
           <a:p>
             <a:fld id="{E9CC885B-4903-4D54-9A93-00025F12DED9}" type="datetimeFigureOut">
               <a:rPr kumimoji="1" lang="ja-JP" altLang="en-US" smtClean="0"/>
-              <a:t>2024/12/19</a:t>
+              <a:t>2025/5/15</a:t>
             </a:fld>
             <a:endParaRPr kumimoji="1" lang="ja-JP" altLang="en-US"/>
           </a:p>
@@ -496,7 +497,7 @@
           <a:p>
             <a:fld id="{E9CC885B-4903-4D54-9A93-00025F12DED9}" type="datetimeFigureOut">
               <a:rPr kumimoji="1" lang="ja-JP" altLang="en-US" smtClean="0"/>
-              <a:t>2024/12/19</a:t>
+              <a:t>2025/5/15</a:t>
             </a:fld>
             <a:endParaRPr kumimoji="1" lang="ja-JP" altLang="en-US"/>
           </a:p>
@@ -736,7 +737,7 @@
           <a:p>
             <a:fld id="{E9CC885B-4903-4D54-9A93-00025F12DED9}" type="datetimeFigureOut">
               <a:rPr kumimoji="1" lang="ja-JP" altLang="en-US" smtClean="0"/>
-              <a:t>2024/12/19</a:t>
+              <a:t>2025/5/15</a:t>
             </a:fld>
             <a:endParaRPr kumimoji="1" lang="ja-JP" altLang="en-US"/>
           </a:p>
@@ -966,7 +967,7 @@
           <a:p>
             <a:fld id="{E9CC885B-4903-4D54-9A93-00025F12DED9}" type="datetimeFigureOut">
               <a:rPr kumimoji="1" lang="ja-JP" altLang="en-US" smtClean="0"/>
-              <a:t>2024/12/19</a:t>
+              <a:t>2025/5/15</a:t>
             </a:fld>
             <a:endParaRPr kumimoji="1" lang="ja-JP" altLang="en-US"/>
           </a:p>
@@ -1241,7 +1242,7 @@
           <a:p>
             <a:fld id="{E9CC885B-4903-4D54-9A93-00025F12DED9}" type="datetimeFigureOut">
               <a:rPr kumimoji="1" lang="ja-JP" altLang="en-US" smtClean="0"/>
-              <a:t>2024/12/19</a:t>
+              <a:t>2025/5/15</a:t>
             </a:fld>
             <a:endParaRPr kumimoji="1" lang="ja-JP" altLang="en-US"/>
           </a:p>
@@ -1570,7 +1571,7 @@
           <a:p>
             <a:fld id="{E9CC885B-4903-4D54-9A93-00025F12DED9}" type="datetimeFigureOut">
               <a:rPr kumimoji="1" lang="ja-JP" altLang="en-US" smtClean="0"/>
-              <a:t>2024/12/19</a:t>
+              <a:t>2025/5/15</a:t>
             </a:fld>
             <a:endParaRPr kumimoji="1" lang="ja-JP" altLang="en-US"/>
           </a:p>
@@ -2046,7 +2047,7 @@
           <a:p>
             <a:fld id="{E9CC885B-4903-4D54-9A93-00025F12DED9}" type="datetimeFigureOut">
               <a:rPr kumimoji="1" lang="ja-JP" altLang="en-US" smtClean="0"/>
-              <a:t>2024/12/19</a:t>
+              <a:t>2025/5/15</a:t>
             </a:fld>
             <a:endParaRPr kumimoji="1" lang="ja-JP" altLang="en-US"/>
           </a:p>
@@ -2187,7 +2188,7 @@
           <a:p>
             <a:fld id="{E9CC885B-4903-4D54-9A93-00025F12DED9}" type="datetimeFigureOut">
               <a:rPr kumimoji="1" lang="ja-JP" altLang="en-US" smtClean="0"/>
-              <a:t>2024/12/19</a:t>
+              <a:t>2025/5/15</a:t>
             </a:fld>
             <a:endParaRPr kumimoji="1" lang="ja-JP" altLang="en-US"/>
           </a:p>
@@ -2300,7 +2301,7 @@
           <a:p>
             <a:fld id="{E9CC885B-4903-4D54-9A93-00025F12DED9}" type="datetimeFigureOut">
               <a:rPr kumimoji="1" lang="ja-JP" altLang="en-US" smtClean="0"/>
-              <a:t>2024/12/19</a:t>
+              <a:t>2025/5/15</a:t>
             </a:fld>
             <a:endParaRPr kumimoji="1" lang="ja-JP" altLang="en-US"/>
           </a:p>
@@ -2643,7 +2644,7 @@
           <a:p>
             <a:fld id="{E9CC885B-4903-4D54-9A93-00025F12DED9}" type="datetimeFigureOut">
               <a:rPr kumimoji="1" lang="ja-JP" altLang="en-US" smtClean="0"/>
-              <a:t>2024/12/19</a:t>
+              <a:t>2025/5/15</a:t>
             </a:fld>
             <a:endParaRPr kumimoji="1" lang="ja-JP" altLang="en-US"/>
           </a:p>
@@ -2931,7 +2932,7 @@
           <a:p>
             <a:fld id="{E9CC885B-4903-4D54-9A93-00025F12DED9}" type="datetimeFigureOut">
               <a:rPr kumimoji="1" lang="ja-JP" altLang="en-US" smtClean="0"/>
-              <a:t>2024/12/19</a:t>
+              <a:t>2025/5/15</a:t>
             </a:fld>
             <a:endParaRPr kumimoji="1" lang="ja-JP" altLang="en-US"/>
           </a:p>
@@ -3204,7 +3205,7 @@
           <a:p>
             <a:fld id="{E9CC885B-4903-4D54-9A93-00025F12DED9}" type="datetimeFigureOut">
               <a:rPr kumimoji="1" lang="ja-JP" altLang="en-US" smtClean="0"/>
-              <a:t>2024/12/19</a:t>
+              <a:t>2025/5/15</a:t>
             </a:fld>
             <a:endParaRPr kumimoji="1" lang="ja-JP" altLang="en-US"/>
           </a:p>
@@ -4880,7 +4881,7 @@
         <p:spPr>
           <a:xfrm>
             <a:off x="567542" y="1216429"/>
-            <a:ext cx="8494633" cy="1938992"/>
+            <a:ext cx="8802410" cy="1938992"/>
           </a:xfrm>
           <a:prstGeom prst="rect">
             <a:avLst/>
@@ -4934,8 +4935,8 @@
               <a:t>※</a:t>
             </a:r>
             <a:r>
-              <a:rPr kumimoji="1" lang="ja-JP" altLang="en-US" sz="2400"/>
-              <a:t>かといって最初から完璧なものはできないのでほどほどで</a:t>
+              <a:rPr kumimoji="1" lang="ja-JP" altLang="en-US" sz="2400" dirty="0"/>
+              <a:t>かといって最初から完璧なものはできないので、ほどほどで</a:t>
             </a:r>
             <a:endParaRPr kumimoji="1" lang="en-US" altLang="ja-JP" sz="2400" dirty="0"/>
           </a:p>
@@ -4945,6 +4946,466 @@
     <p:extLst>
       <p:ext uri="{BB962C8B-B14F-4D97-AF65-F5344CB8AC3E}">
         <p14:creationId xmlns:p14="http://schemas.microsoft.com/office/powerpoint/2010/main" val="1324535630"/>
+      </p:ext>
+    </p:extLst>
+  </p:cSld>
+  <p:clrMapOvr>
+    <a:masterClrMapping/>
+  </p:clrMapOvr>
+</p:sld>
+</file>
+
+<file path=ppt/slides/slide9.xml><?xml version="1.0" encoding="utf-8"?>
+<p:sld xmlns:a="http://schemas.openxmlformats.org/drawingml/2006/main" xmlns:r="http://schemas.openxmlformats.org/officeDocument/2006/relationships" xmlns:p="http://schemas.openxmlformats.org/presentationml/2006/main">
+  <p:cSld>
+    <p:spTree>
+      <p:nvGrpSpPr>
+        <p:cNvPr id="1" name=""/>
+        <p:cNvGrpSpPr/>
+        <p:nvPr/>
+      </p:nvGrpSpPr>
+      <p:grpSpPr>
+        <a:xfrm>
+          <a:off x="0" y="0"/>
+          <a:ext cx="0" cy="0"/>
+          <a:chOff x="0" y="0"/>
+          <a:chExt cx="0" cy="0"/>
+        </a:xfrm>
+      </p:grpSpPr>
+      <p:sp>
+        <p:nvSpPr>
+          <p:cNvPr id="4" name="テキスト ボックス 3">
+            <a:extLst>
+              <a:ext uri="{FF2B5EF4-FFF2-40B4-BE49-F238E27FC236}">
+                <a16:creationId xmlns:a16="http://schemas.microsoft.com/office/drawing/2014/main" id="{5A13BF46-B8C5-48AA-8308-C9ECFF431A18}"/>
+              </a:ext>
+            </a:extLst>
+          </p:cNvPr>
+          <p:cNvSpPr txBox="1"/>
+          <p:nvPr/>
+        </p:nvSpPr>
+        <p:spPr>
+          <a:xfrm>
+            <a:off x="567542" y="491954"/>
+            <a:ext cx="1826141" cy="584775"/>
+          </a:xfrm>
+          <a:prstGeom prst="rect">
+            <a:avLst/>
+          </a:prstGeom>
+          <a:noFill/>
+        </p:spPr>
+        <p:txBody>
+          <a:bodyPr wrap="none" rtlCol="0">
+            <a:spAutoFit/>
+          </a:bodyPr>
+          <a:lstStyle/>
+          <a:p>
+            <a:r>
+              <a:rPr kumimoji="1" lang="ja-JP" altLang="en-US" sz="3200" b="1" u="sng" dirty="0"/>
+              <a:t>就職作品</a:t>
+            </a:r>
+            <a:endParaRPr kumimoji="1" lang="en-US" altLang="ja-JP" sz="3200" b="1" u="sng" dirty="0"/>
+          </a:p>
+        </p:txBody>
+      </p:sp>
+      <p:sp>
+        <p:nvSpPr>
+          <p:cNvPr id="6" name="テキスト ボックス 5">
+            <a:extLst>
+              <a:ext uri="{FF2B5EF4-FFF2-40B4-BE49-F238E27FC236}">
+                <a16:creationId xmlns:a16="http://schemas.microsoft.com/office/drawing/2014/main" id="{55830AD6-028B-4C4E-80BF-B70DFC1C3A46}"/>
+              </a:ext>
+            </a:extLst>
+          </p:cNvPr>
+          <p:cNvSpPr txBox="1"/>
+          <p:nvPr/>
+        </p:nvSpPr>
+        <p:spPr>
+          <a:xfrm>
+            <a:off x="567542" y="1216429"/>
+            <a:ext cx="10341293" cy="1569660"/>
+          </a:xfrm>
+          <a:prstGeom prst="rect">
+            <a:avLst/>
+          </a:prstGeom>
+          <a:noFill/>
+        </p:spPr>
+        <p:txBody>
+          <a:bodyPr wrap="none" rtlCol="0">
+            <a:spAutoFit/>
+          </a:bodyPr>
+          <a:lstStyle/>
+          <a:p>
+            <a:r>
+              <a:rPr kumimoji="1" lang="ja-JP" altLang="en-US" sz="2400" dirty="0"/>
+              <a:t>ゲーム開発</a:t>
+            </a:r>
+            <a:r>
+              <a:rPr kumimoji="1" lang="en-US" altLang="ja-JP" sz="2400" dirty="0"/>
+              <a:t>Ⅱ</a:t>
+            </a:r>
+            <a:r>
+              <a:rPr kumimoji="1" lang="ja-JP" altLang="en-US" sz="2400" dirty="0"/>
+              <a:t>では就職作品の</a:t>
+            </a:r>
+            <a:r>
+              <a:rPr kumimoji="1" lang="en-US" altLang="ja-JP" sz="2400" b="1" dirty="0">
+                <a:solidFill>
+                  <a:srgbClr val="FF0000"/>
+                </a:solidFill>
+              </a:rPr>
+              <a:t>α</a:t>
+            </a:r>
+            <a:r>
+              <a:rPr kumimoji="1" lang="ja-JP" altLang="en-US" sz="2400" b="1" dirty="0">
+                <a:solidFill>
+                  <a:srgbClr val="FF0000"/>
+                </a:solidFill>
+              </a:rPr>
+              <a:t>版で効果測定</a:t>
+            </a:r>
+            <a:r>
+              <a:rPr kumimoji="1" lang="ja-JP" altLang="en-US" sz="2400" dirty="0"/>
+              <a:t>を行います。</a:t>
+            </a:r>
+            <a:endParaRPr kumimoji="1" lang="en-US" altLang="ja-JP" sz="2400" dirty="0"/>
+          </a:p>
+          <a:p>
+            <a:r>
+              <a:rPr lang="en-US" altLang="ja-JP" sz="2400" dirty="0"/>
+              <a:t>α</a:t>
+            </a:r>
+            <a:r>
+              <a:rPr lang="ja-JP" altLang="en-US" sz="2400" dirty="0"/>
+              <a:t>版とは、</a:t>
+            </a:r>
+            <a:r>
+              <a:rPr lang="ja-JP" altLang="en-US" sz="2400" b="1" dirty="0">
+                <a:solidFill>
+                  <a:srgbClr val="FF0000"/>
+                </a:solidFill>
+              </a:rPr>
+              <a:t>ゲームを遊ぶための機能がすべて実装されたバージョン</a:t>
+            </a:r>
+            <a:r>
+              <a:rPr lang="ja-JP" altLang="en-US" sz="2400" dirty="0"/>
+              <a:t>です。</a:t>
+            </a:r>
+            <a:endParaRPr lang="en-US" altLang="ja-JP" sz="2400" dirty="0"/>
+          </a:p>
+          <a:p>
+            <a:endParaRPr kumimoji="1" lang="en-US" altLang="ja-JP" sz="2400" dirty="0"/>
+          </a:p>
+          <a:p>
+            <a:r>
+              <a:rPr lang="ja-JP" altLang="en-US" sz="2400" b="1" dirty="0">
+                <a:solidFill>
+                  <a:srgbClr val="FF0000"/>
+                </a:solidFill>
+              </a:rPr>
+              <a:t>■スーパーマリオブラザーズの例</a:t>
+            </a:r>
+            <a:endParaRPr kumimoji="1" lang="en-US" altLang="ja-JP" sz="2400" b="1" dirty="0">
+              <a:solidFill>
+                <a:srgbClr val="FF0000"/>
+              </a:solidFill>
+            </a:endParaRPr>
+          </a:p>
+        </p:txBody>
+      </p:sp>
+      <p:sp>
+        <p:nvSpPr>
+          <p:cNvPr id="2" name="四角形: 角を丸くする 1">
+            <a:extLst>
+              <a:ext uri="{FF2B5EF4-FFF2-40B4-BE49-F238E27FC236}">
+                <a16:creationId xmlns:a16="http://schemas.microsoft.com/office/drawing/2014/main" id="{B07BB018-EB2B-4DCF-A6FF-B207E9CF244B}"/>
+              </a:ext>
+            </a:extLst>
+          </p:cNvPr>
+          <p:cNvSpPr/>
+          <p:nvPr/>
+        </p:nvSpPr>
+        <p:spPr>
+          <a:xfrm>
+            <a:off x="567542" y="2786089"/>
+            <a:ext cx="4739564" cy="3964335"/>
+          </a:xfrm>
+          <a:prstGeom prst="roundRect">
+            <a:avLst/>
+          </a:prstGeom>
+        </p:spPr>
+        <p:style>
+          <a:lnRef idx="2">
+            <a:schemeClr val="accent2">
+              <a:shade val="50000"/>
+            </a:schemeClr>
+          </a:lnRef>
+          <a:fillRef idx="1">
+            <a:schemeClr val="accent2"/>
+          </a:fillRef>
+          <a:effectRef idx="0">
+            <a:schemeClr val="accent2"/>
+          </a:effectRef>
+          <a:fontRef idx="minor">
+            <a:schemeClr val="lt1"/>
+          </a:fontRef>
+        </p:style>
+        <p:txBody>
+          <a:bodyPr rtlCol="0" anchor="ctr"/>
+          <a:lstStyle/>
+          <a:p>
+            <a:pPr algn="ctr"/>
+            <a:r>
+              <a:rPr kumimoji="1" lang="en-US" altLang="ja-JP" b="1" dirty="0"/>
+              <a:t>α</a:t>
+            </a:r>
+            <a:r>
+              <a:rPr kumimoji="1" lang="ja-JP" altLang="en-US" b="1" dirty="0"/>
+              <a:t>版に含まれるもの</a:t>
+            </a:r>
+            <a:endParaRPr kumimoji="1" lang="en-US" altLang="ja-JP" b="1" dirty="0"/>
+          </a:p>
+          <a:p>
+            <a:endParaRPr lang="en-US" altLang="ja-JP" dirty="0"/>
+          </a:p>
+          <a:p>
+            <a:r>
+              <a:rPr kumimoji="1" lang="ja-JP" altLang="en-US" sz="1600" dirty="0"/>
+              <a:t>・マリオ</a:t>
+            </a:r>
+            <a:endParaRPr kumimoji="1" lang="en-US" altLang="ja-JP" sz="1600" dirty="0"/>
+          </a:p>
+          <a:p>
+            <a:r>
+              <a:rPr lang="ja-JP" altLang="en-US" sz="1600" dirty="0"/>
+              <a:t>　・移動、しゃがみ、ジャンプ、</a:t>
+            </a:r>
+            <a:r>
+              <a:rPr lang="en-US" altLang="ja-JP" sz="1600" dirty="0"/>
+              <a:t>B</a:t>
+            </a:r>
+            <a:r>
+              <a:rPr lang="ja-JP" altLang="en-US" sz="1600" dirty="0"/>
+              <a:t>ダッシュ</a:t>
+            </a:r>
+            <a:endParaRPr kumimoji="1" lang="en-US" altLang="ja-JP" sz="1600" dirty="0"/>
+          </a:p>
+          <a:p>
+            <a:r>
+              <a:rPr kumimoji="1" lang="ja-JP" altLang="en-US" sz="1600" dirty="0"/>
+              <a:t>・クリボー</a:t>
+            </a:r>
+            <a:endParaRPr kumimoji="1" lang="en-US" altLang="ja-JP" sz="1600" dirty="0"/>
+          </a:p>
+          <a:p>
+            <a:r>
+              <a:rPr lang="ja-JP" altLang="en-US" sz="1600" dirty="0"/>
+              <a:t>　・移動</a:t>
+            </a:r>
+            <a:endParaRPr lang="en-US" altLang="ja-JP" sz="1600" dirty="0"/>
+          </a:p>
+          <a:p>
+            <a:r>
+              <a:rPr kumimoji="1" lang="ja-JP" altLang="en-US" sz="1600" dirty="0"/>
+              <a:t>・パタクリボー</a:t>
+            </a:r>
+            <a:endParaRPr kumimoji="1" lang="en-US" altLang="ja-JP" sz="1600" dirty="0"/>
+          </a:p>
+          <a:p>
+            <a:r>
+              <a:rPr lang="ja-JP" altLang="en-US" sz="1600" dirty="0"/>
+              <a:t>　・移動、ジャンプ、羽が取れる</a:t>
+            </a:r>
+            <a:endParaRPr lang="en-US" altLang="ja-JP" sz="1600" dirty="0"/>
+          </a:p>
+          <a:p>
+            <a:r>
+              <a:rPr kumimoji="1" lang="ja-JP" altLang="en-US" sz="1600" dirty="0"/>
+              <a:t>・システム</a:t>
+            </a:r>
+            <a:endParaRPr kumimoji="1" lang="en-US" altLang="ja-JP" sz="1600" dirty="0"/>
+          </a:p>
+          <a:p>
+            <a:r>
+              <a:rPr lang="ja-JP" altLang="en-US" sz="1600" dirty="0"/>
+              <a:t>　・当たり判定</a:t>
+            </a:r>
+            <a:endParaRPr lang="en-US" altLang="ja-JP" sz="1600" dirty="0"/>
+          </a:p>
+          <a:p>
+            <a:r>
+              <a:rPr kumimoji="1" lang="ja-JP" altLang="en-US" sz="1600" dirty="0"/>
+              <a:t>　・</a:t>
+            </a:r>
+            <a:r>
+              <a:rPr lang="ja-JP" altLang="en-US" sz="1600" dirty="0"/>
+              <a:t>残機</a:t>
+            </a:r>
+            <a:endParaRPr lang="en-US" altLang="ja-JP" sz="1600" dirty="0"/>
+          </a:p>
+          <a:p>
+            <a:r>
+              <a:rPr kumimoji="1" lang="ja-JP" altLang="en-US" sz="1600" dirty="0"/>
+              <a:t>　・スコア</a:t>
+            </a:r>
+            <a:endParaRPr kumimoji="1" lang="en-US" altLang="ja-JP" sz="1600" dirty="0"/>
+          </a:p>
+          <a:p>
+            <a:r>
+              <a:rPr lang="ja-JP" altLang="en-US" sz="1600" dirty="0"/>
+              <a:t>　・ゴール、ゴール花火</a:t>
+            </a:r>
+            <a:endParaRPr lang="en-US" altLang="ja-JP" sz="1600" dirty="0"/>
+          </a:p>
+          <a:p>
+            <a:r>
+              <a:rPr kumimoji="1" lang="ja-JP" altLang="en-US" sz="1600" dirty="0"/>
+              <a:t>　・落下死</a:t>
+            </a:r>
+            <a:endParaRPr kumimoji="1" lang="en-US" altLang="ja-JP" sz="1600" dirty="0"/>
+          </a:p>
+          <a:p>
+            <a:r>
+              <a:rPr lang="ja-JP" altLang="en-US" sz="1600" dirty="0"/>
+              <a:t>　・シーン遷移</a:t>
+            </a:r>
+            <a:endParaRPr kumimoji="1" lang="ja-JP" altLang="en-US" sz="1600" dirty="0"/>
+          </a:p>
+        </p:txBody>
+      </p:sp>
+      <p:sp>
+        <p:nvSpPr>
+          <p:cNvPr id="5" name="四角形: 角を丸くする 4">
+            <a:extLst>
+              <a:ext uri="{FF2B5EF4-FFF2-40B4-BE49-F238E27FC236}">
+                <a16:creationId xmlns:a16="http://schemas.microsoft.com/office/drawing/2014/main" id="{272C7D20-AD8E-4F1C-B5B0-788B6021964B}"/>
+              </a:ext>
+            </a:extLst>
+          </p:cNvPr>
+          <p:cNvSpPr/>
+          <p:nvPr/>
+        </p:nvSpPr>
+        <p:spPr>
+          <a:xfrm>
+            <a:off x="5738188" y="2786089"/>
+            <a:ext cx="4739564" cy="3964335"/>
+          </a:xfrm>
+          <a:prstGeom prst="roundRect">
+            <a:avLst/>
+          </a:prstGeom>
+        </p:spPr>
+        <p:style>
+          <a:lnRef idx="2">
+            <a:schemeClr val="accent5">
+              <a:shade val="50000"/>
+            </a:schemeClr>
+          </a:lnRef>
+          <a:fillRef idx="1">
+            <a:schemeClr val="accent5"/>
+          </a:fillRef>
+          <a:effectRef idx="0">
+            <a:schemeClr val="accent5"/>
+          </a:effectRef>
+          <a:fontRef idx="minor">
+            <a:schemeClr val="lt1"/>
+          </a:fontRef>
+        </p:style>
+        <p:txBody>
+          <a:bodyPr rtlCol="0" anchor="ctr"/>
+          <a:lstStyle/>
+          <a:p>
+            <a:pPr algn="ctr"/>
+            <a:r>
+              <a:rPr kumimoji="1" lang="en-US" altLang="ja-JP" b="1" dirty="0"/>
+              <a:t>α</a:t>
+            </a:r>
+            <a:r>
+              <a:rPr kumimoji="1" lang="ja-JP" altLang="en-US" b="1" dirty="0"/>
+              <a:t>版に含まれないもの</a:t>
+            </a:r>
+            <a:endParaRPr kumimoji="1" lang="en-US" altLang="ja-JP" b="1" dirty="0"/>
+          </a:p>
+          <a:p>
+            <a:endParaRPr lang="en-US" altLang="ja-JP" dirty="0"/>
+          </a:p>
+          <a:p>
+            <a:r>
+              <a:rPr kumimoji="1" lang="ja-JP" altLang="en-US" sz="1600" dirty="0"/>
+              <a:t>・マリオ</a:t>
+            </a:r>
+            <a:endParaRPr kumimoji="1" lang="en-US" altLang="ja-JP" sz="1600" dirty="0"/>
+          </a:p>
+          <a:p>
+            <a:r>
+              <a:rPr lang="ja-JP" altLang="en-US" sz="1600" dirty="0"/>
+              <a:t>　・移動速度の調整</a:t>
+            </a:r>
+            <a:endParaRPr lang="en-US" altLang="ja-JP" sz="1600" dirty="0"/>
+          </a:p>
+          <a:p>
+            <a:r>
+              <a:rPr kumimoji="1" lang="ja-JP" altLang="en-US" sz="1600" dirty="0"/>
+              <a:t>　・ジャンプ力の調整</a:t>
+            </a:r>
+            <a:endParaRPr kumimoji="1" lang="en-US" altLang="ja-JP" sz="1600" dirty="0"/>
+          </a:p>
+          <a:p>
+            <a:r>
+              <a:rPr kumimoji="1" lang="ja-JP" altLang="en-US" sz="1600" dirty="0"/>
+              <a:t>・システム</a:t>
+            </a:r>
+            <a:endParaRPr kumimoji="1" lang="en-US" altLang="ja-JP" sz="1600" dirty="0"/>
+          </a:p>
+          <a:p>
+            <a:r>
+              <a:rPr lang="ja-JP" altLang="en-US" sz="1600" dirty="0"/>
+              <a:t>　・当たり判定の大きさ調整</a:t>
+            </a:r>
+            <a:endParaRPr lang="en-US" altLang="ja-JP" sz="1600" dirty="0"/>
+          </a:p>
+          <a:p>
+            <a:r>
+              <a:rPr kumimoji="1" lang="ja-JP" altLang="en-US" sz="1600" dirty="0"/>
+              <a:t>　・敵を倒したときに増えるスコアの調整</a:t>
+            </a:r>
+            <a:endParaRPr kumimoji="1" lang="en-US" altLang="ja-JP" sz="1600" dirty="0"/>
+          </a:p>
+          <a:p>
+            <a:r>
+              <a:rPr lang="ja-JP" altLang="en-US" sz="1600" dirty="0"/>
+              <a:t>・ステージ設計</a:t>
+            </a:r>
+            <a:endParaRPr lang="en-US" altLang="ja-JP" sz="1600" dirty="0"/>
+          </a:p>
+          <a:p>
+            <a:r>
+              <a:rPr kumimoji="1" lang="ja-JP" altLang="en-US" sz="1600" dirty="0"/>
+              <a:t>　・ブロック配置、敵配置、落とし穴配置</a:t>
+            </a:r>
+            <a:endParaRPr kumimoji="1" lang="en-US" altLang="ja-JP" sz="1600" dirty="0"/>
+          </a:p>
+          <a:p>
+            <a:r>
+              <a:rPr lang="ja-JP" altLang="en-US" sz="1600" dirty="0"/>
+              <a:t>・タイトル画面のデザイン</a:t>
+            </a:r>
+            <a:endParaRPr lang="en-US" altLang="ja-JP" sz="1600" dirty="0"/>
+          </a:p>
+          <a:p>
+            <a:endParaRPr lang="en-US" altLang="ja-JP" sz="1600" dirty="0"/>
+          </a:p>
+          <a:p>
+            <a:endParaRPr lang="en-US" altLang="ja-JP" sz="1600" dirty="0"/>
+          </a:p>
+          <a:p>
+            <a:endParaRPr lang="en-US" altLang="ja-JP" sz="1600" dirty="0"/>
+          </a:p>
+        </p:txBody>
+      </p:sp>
+    </p:spTree>
+    <p:extLst>
+      <p:ext uri="{BB962C8B-B14F-4D97-AF65-F5344CB8AC3E}">
+        <p14:creationId xmlns:p14="http://schemas.microsoft.com/office/powerpoint/2010/main" val="921013763"/>
       </p:ext>
     </p:extLst>
   </p:cSld>
